--- a/Intelligence-Driven Defense.pptx
+++ b/Intelligence-Driven Defense.pptx
@@ -14,14 +14,13 @@
     <p:sldId id="260" r:id="rId8"/>
     <p:sldId id="261" r:id="rId9"/>
     <p:sldId id="262" r:id="rId10"/>
-    <p:sldId id="263" r:id="rId11"/>
-    <p:sldId id="264" r:id="rId12"/>
-    <p:sldId id="265" r:id="rId13"/>
-    <p:sldId id="266" r:id="rId14"/>
-    <p:sldId id="269" r:id="rId15"/>
-    <p:sldId id="270" r:id="rId16"/>
-    <p:sldId id="267" r:id="rId17"/>
-    <p:sldId id="268" r:id="rId18"/>
+    <p:sldId id="264" r:id="rId11"/>
+    <p:sldId id="265" r:id="rId12"/>
+    <p:sldId id="266" r:id="rId13"/>
+    <p:sldId id="269" r:id="rId14"/>
+    <p:sldId id="270" r:id="rId15"/>
+    <p:sldId id="267" r:id="rId16"/>
+    <p:sldId id="268" r:id="rId17"/>
   </p:sldIdLst>
   <p:sldSz cx="12192000" cy="6858000"/>
   <p:notesSz cx="6858000" cy="9144000"/>
@@ -120,6 +119,11 @@
       </a:defRPr>
     </a:lvl9pPr>
   </p:defaultTextStyle>
+  <p:extLst>
+    <p:ext uri="{EFAFB233-063F-42B5-8137-9DF3F51BA10A}">
+      <p15:sldGuideLst xmlns:p15="http://schemas.microsoft.com/office/powerpoint/2012/main"/>
+    </p:ext>
+  </p:extLst>
 </p:presentation>
 </file>
 
@@ -270,7 +274,7 @@
           <a:p>
             <a:fld id="{6E1CE029-A3B5-41F5-9950-61918F1CEEA2}" type="datetimeFigureOut">
               <a:rPr lang="en-US" smtClean="0"/>
-              <a:t>11/4/2025</a:t>
+              <a:t>11/8/2025</a:t>
             </a:fld>
             <a:endParaRPr lang="en-US"/>
           </a:p>
@@ -468,7 +472,7 @@
           <a:p>
             <a:fld id="{6E1CE029-A3B5-41F5-9950-61918F1CEEA2}" type="datetimeFigureOut">
               <a:rPr lang="en-US" smtClean="0"/>
-              <a:t>11/4/2025</a:t>
+              <a:t>11/8/2025</a:t>
             </a:fld>
             <a:endParaRPr lang="en-US"/>
           </a:p>
@@ -676,7 +680,7 @@
           <a:p>
             <a:fld id="{6E1CE029-A3B5-41F5-9950-61918F1CEEA2}" type="datetimeFigureOut">
               <a:rPr lang="en-US" smtClean="0"/>
-              <a:t>11/4/2025</a:t>
+              <a:t>11/8/2025</a:t>
             </a:fld>
             <a:endParaRPr lang="en-US"/>
           </a:p>
@@ -874,7 +878,7 @@
           <a:p>
             <a:fld id="{6E1CE029-A3B5-41F5-9950-61918F1CEEA2}" type="datetimeFigureOut">
               <a:rPr lang="en-US" smtClean="0"/>
-              <a:t>11/4/2025</a:t>
+              <a:t>11/8/2025</a:t>
             </a:fld>
             <a:endParaRPr lang="en-US"/>
           </a:p>
@@ -1149,7 +1153,7 @@
           <a:p>
             <a:fld id="{6E1CE029-A3B5-41F5-9950-61918F1CEEA2}" type="datetimeFigureOut">
               <a:rPr lang="en-US" smtClean="0"/>
-              <a:t>11/4/2025</a:t>
+              <a:t>11/8/2025</a:t>
             </a:fld>
             <a:endParaRPr lang="en-US"/>
           </a:p>
@@ -1414,7 +1418,7 @@
           <a:p>
             <a:fld id="{6E1CE029-A3B5-41F5-9950-61918F1CEEA2}" type="datetimeFigureOut">
               <a:rPr lang="en-US" smtClean="0"/>
-              <a:t>11/4/2025</a:t>
+              <a:t>11/8/2025</a:t>
             </a:fld>
             <a:endParaRPr lang="en-US"/>
           </a:p>
@@ -1826,7 +1830,7 @@
           <a:p>
             <a:fld id="{6E1CE029-A3B5-41F5-9950-61918F1CEEA2}" type="datetimeFigureOut">
               <a:rPr lang="en-US" smtClean="0"/>
-              <a:t>11/4/2025</a:t>
+              <a:t>11/8/2025</a:t>
             </a:fld>
             <a:endParaRPr lang="en-US"/>
           </a:p>
@@ -1967,7 +1971,7 @@
           <a:p>
             <a:fld id="{6E1CE029-A3B5-41F5-9950-61918F1CEEA2}" type="datetimeFigureOut">
               <a:rPr lang="en-US" smtClean="0"/>
-              <a:t>11/4/2025</a:t>
+              <a:t>11/8/2025</a:t>
             </a:fld>
             <a:endParaRPr lang="en-US"/>
           </a:p>
@@ -2080,7 +2084,7 @@
           <a:p>
             <a:fld id="{6E1CE029-A3B5-41F5-9950-61918F1CEEA2}" type="datetimeFigureOut">
               <a:rPr lang="en-US" smtClean="0"/>
-              <a:t>11/4/2025</a:t>
+              <a:t>11/8/2025</a:t>
             </a:fld>
             <a:endParaRPr lang="en-US"/>
           </a:p>
@@ -2391,7 +2395,7 @@
           <a:p>
             <a:fld id="{6E1CE029-A3B5-41F5-9950-61918F1CEEA2}" type="datetimeFigureOut">
               <a:rPr lang="en-US" smtClean="0"/>
-              <a:t>11/4/2025</a:t>
+              <a:t>11/8/2025</a:t>
             </a:fld>
             <a:endParaRPr lang="en-US"/>
           </a:p>
@@ -2679,7 +2683,7 @@
           <a:p>
             <a:fld id="{6E1CE029-A3B5-41F5-9950-61918F1CEEA2}" type="datetimeFigureOut">
               <a:rPr lang="en-US" smtClean="0"/>
-              <a:t>11/4/2025</a:t>
+              <a:t>11/8/2025</a:t>
             </a:fld>
             <a:endParaRPr lang="en-US"/>
           </a:p>
@@ -2920,7 +2924,7 @@
           <a:p>
             <a:fld id="{6E1CE029-A3B5-41F5-9950-61918F1CEEA2}" type="datetimeFigureOut">
               <a:rPr lang="en-US" smtClean="0"/>
-              <a:t>11/4/2025</a:t>
+              <a:t>11/8/2025</a:t>
             </a:fld>
             <a:endParaRPr lang="en-US"/>
           </a:p>
@@ -3440,7 +3444,7 @@
           <p:cNvPr id="2" name="Title 1">
             <a:extLst>
               <a:ext uri="{FF2B5EF4-FFF2-40B4-BE49-F238E27FC236}">
-                <a16:creationId xmlns:a16="http://schemas.microsoft.com/office/drawing/2014/main" id="{B6B5C5DB-1AAC-3F01-CA4E-1F38B3DDB1E5}"/>
+                <a16:creationId xmlns:a16="http://schemas.microsoft.com/office/drawing/2014/main" id="{24FBEC14-E9AA-7B76-A551-1DDF58151FE1}"/>
               </a:ext>
             </a:extLst>
           </p:cNvPr>
@@ -3457,10 +3461,8 @@
           <a:lstStyle/>
           <a:p>
             <a:r>
-              <a:rPr lang="en-US" dirty="0">
-                <a:latin typeface="Consolas" panose="020B0609020204030204" pitchFamily="49" charset="0"/>
-              </a:rPr>
-              <a:t>Intelligence-Driven Detection</a:t>
+              <a:rPr lang="en-US" dirty="0"/>
+              <a:t>Threat Hunting with CTI</a:t>
             </a:r>
           </a:p>
         </p:txBody>
@@ -3470,7 +3472,7 @@
           <p:cNvPr id="3" name="Content Placeholder 2">
             <a:extLst>
               <a:ext uri="{FF2B5EF4-FFF2-40B4-BE49-F238E27FC236}">
-                <a16:creationId xmlns:a16="http://schemas.microsoft.com/office/drawing/2014/main" id="{6204DC4E-594F-2B65-805F-7FD9944CB294}"/>
+                <a16:creationId xmlns:a16="http://schemas.microsoft.com/office/drawing/2014/main" id="{7BF5979C-F259-0785-0487-7D56591824D6}"/>
               </a:ext>
             </a:extLst>
           </p:cNvPr>
@@ -3487,43 +3489,49 @@
           <a:lstStyle/>
           <a:p>
             <a:r>
-              <a:rPr lang="en-US" dirty="0">
-                <a:solidFill>
-                  <a:srgbClr val="002060"/>
-                </a:solidFill>
-                <a:latin typeface="Consolas" panose="020B0609020204030204" pitchFamily="49" charset="0"/>
-              </a:rPr>
-              <a:t>Behavior over Indicators</a:t>
-            </a:r>
-          </a:p>
-          <a:p>
-            <a:r>
-              <a:rPr lang="en-US" dirty="0">
-                <a:solidFill>
-                  <a:srgbClr val="002060"/>
-                </a:solidFill>
-                <a:latin typeface="Consolas" panose="020B0609020204030204" pitchFamily="49" charset="0"/>
-              </a:rPr>
-              <a:t>TTP-based correlation</a:t>
-            </a:r>
-          </a:p>
-          <a:p>
-            <a:r>
-              <a:rPr lang="en-US" dirty="0">
-                <a:solidFill>
-                  <a:srgbClr val="002060"/>
-                </a:solidFill>
-                <a:latin typeface="Consolas" panose="020B0609020204030204" pitchFamily="49" charset="0"/>
-              </a:rPr>
-              <a:t>Continuous intel updates</a:t>
-            </a:r>
+              <a:rPr lang="en-US" sz="3600" dirty="0">
+                <a:solidFill>
+                  <a:srgbClr val="002060"/>
+                </a:solidFill>
+              </a:rPr>
+              <a:t>Hypothesis-based hunting</a:t>
+            </a:r>
+          </a:p>
+          <a:p>
+            <a:r>
+              <a:rPr lang="en-US" sz="3600" dirty="0">
+                <a:solidFill>
+                  <a:srgbClr val="002060"/>
+                </a:solidFill>
+              </a:rPr>
+              <a:t>Use intel to focus hunts</a:t>
+            </a:r>
+          </a:p>
+          <a:p>
+            <a:r>
+              <a:rPr lang="en-US" sz="3600" dirty="0">
+                <a:solidFill>
+                  <a:srgbClr val="002060"/>
+                </a:solidFill>
+              </a:rPr>
+              <a:t>Learn and feedback</a:t>
+            </a:r>
+          </a:p>
+          <a:p>
+            <a:endParaRPr lang="en-US" dirty="0"/>
+          </a:p>
+          <a:p>
+            <a:pPr marL="0" indent="0">
+              <a:buNone/>
+            </a:pPr>
+            <a:endParaRPr lang="en-US" dirty="0"/>
           </a:p>
         </p:txBody>
       </p:sp>
     </p:spTree>
     <p:extLst>
       <p:ext uri="{BB962C8B-B14F-4D97-AF65-F5344CB8AC3E}">
-        <p14:creationId xmlns:p14="http://schemas.microsoft.com/office/powerpoint/2010/main" val="1160594861"/>
+        <p14:creationId xmlns:p14="http://schemas.microsoft.com/office/powerpoint/2010/main" val="3293701352"/>
       </p:ext>
     </p:extLst>
   </p:cSld>
@@ -3555,7 +3563,7 @@
           <p:cNvPr id="2" name="Title 1">
             <a:extLst>
               <a:ext uri="{FF2B5EF4-FFF2-40B4-BE49-F238E27FC236}">
-                <a16:creationId xmlns:a16="http://schemas.microsoft.com/office/drawing/2014/main" id="{24FBEC14-E9AA-7B76-A551-1DDF58151FE1}"/>
+                <a16:creationId xmlns:a16="http://schemas.microsoft.com/office/drawing/2014/main" id="{2C2BB8FD-7BC1-9721-FC67-04AD2CF45C01}"/>
               </a:ext>
             </a:extLst>
           </p:cNvPr>
@@ -3573,7 +3581,15 @@
           <a:p>
             <a:r>
               <a:rPr lang="en-US" dirty="0"/>
-              <a:t>Threat Hunting with CTI</a:t>
+              <a:t>Case Study: </a:t>
+            </a:r>
+            <a:r>
+              <a:rPr lang="en-US" dirty="0" err="1"/>
+              <a:t>Fawry</a:t>
+            </a:r>
+            <a:r>
+              <a:rPr lang="en-US" dirty="0"/>
+              <a:t> Data Breach (Egypt, 2023)</a:t>
             </a:r>
           </a:p>
         </p:txBody>
@@ -3583,7 +3599,7 @@
           <p:cNvPr id="3" name="Content Placeholder 2">
             <a:extLst>
               <a:ext uri="{FF2B5EF4-FFF2-40B4-BE49-F238E27FC236}">
-                <a16:creationId xmlns:a16="http://schemas.microsoft.com/office/drawing/2014/main" id="{7BF5979C-F259-0785-0487-7D56591824D6}"/>
+                <a16:creationId xmlns:a16="http://schemas.microsoft.com/office/drawing/2014/main" id="{C3EE05A9-9C09-471D-F713-CAFC78FF957A}"/>
               </a:ext>
             </a:extLst>
           </p:cNvPr>
@@ -3599,42 +3615,117 @@
           <a:bodyPr/>
           <a:lstStyle/>
           <a:p>
-            <a:r>
-              <a:rPr lang="en-US" sz="3600" dirty="0">
-                <a:solidFill>
-                  <a:srgbClr val="002060"/>
-                </a:solidFill>
-              </a:rPr>
-              <a:t>Hypothesis-based hunting</a:t>
-            </a:r>
-          </a:p>
-          <a:p>
-            <a:r>
-              <a:rPr lang="en-US" sz="3600" dirty="0">
-                <a:solidFill>
-                  <a:srgbClr val="002060"/>
-                </a:solidFill>
-              </a:rPr>
-              <a:t>Use intel to focus hunts</a:t>
-            </a:r>
-          </a:p>
-          <a:p>
-            <a:r>
-              <a:rPr lang="en-US" sz="3600" dirty="0">
-                <a:solidFill>
-                  <a:srgbClr val="002060"/>
-                </a:solidFill>
-              </a:rPr>
-              <a:t>Learn and feed back</a:t>
-            </a:r>
-          </a:p>
-          <a:p>
-            <a:endParaRPr lang="en-US" dirty="0"/>
-          </a:p>
-          <a:p>
-            <a:pPr marL="0" indent="0">
+            <a:pPr>
               <a:buNone/>
             </a:pPr>
+            <a:r>
+              <a:rPr lang="en-US" sz="3200" b="1" dirty="0">
+                <a:solidFill>
+                  <a:srgbClr val="002060"/>
+                </a:solidFill>
+              </a:rPr>
+              <a:t>Case Study: </a:t>
+            </a:r>
+            <a:r>
+              <a:rPr lang="en-US" sz="3200" b="1" dirty="0" err="1">
+                <a:solidFill>
+                  <a:srgbClr val="002060"/>
+                </a:solidFill>
+              </a:rPr>
+              <a:t>Fawry</a:t>
+            </a:r>
+            <a:r>
+              <a:rPr lang="en-US" sz="3200" b="1" dirty="0">
+                <a:solidFill>
+                  <a:srgbClr val="002060"/>
+                </a:solidFill>
+              </a:rPr>
+              <a:t> Data Breach – Egypt (2023)</a:t>
+            </a:r>
+            <a:endParaRPr lang="en-US" sz="3200" dirty="0">
+              <a:solidFill>
+                <a:srgbClr val="002060"/>
+              </a:solidFill>
+            </a:endParaRPr>
+          </a:p>
+          <a:p>
+            <a:pPr>
+              <a:buFont typeface="Arial" panose="020B0604020202020204" pitchFamily="34" charset="0"/>
+              <a:buChar char="•"/>
+            </a:pPr>
+            <a:r>
+              <a:rPr lang="en-US" sz="3200" dirty="0" err="1">
+                <a:solidFill>
+                  <a:srgbClr val="002060"/>
+                </a:solidFill>
+              </a:rPr>
+              <a:t>LockBit</a:t>
+            </a:r>
+            <a:r>
+              <a:rPr lang="en-US" sz="3200" dirty="0">
+                <a:solidFill>
+                  <a:srgbClr val="002060"/>
+                </a:solidFill>
+              </a:rPr>
+              <a:t> ransomware claimed attack on </a:t>
+            </a:r>
+            <a:r>
+              <a:rPr lang="en-US" sz="3200" dirty="0" err="1">
+                <a:solidFill>
+                  <a:srgbClr val="002060"/>
+                </a:solidFill>
+              </a:rPr>
+              <a:t>Fawry</a:t>
+            </a:r>
+            <a:endParaRPr lang="en-US" sz="3200" dirty="0">
+              <a:solidFill>
+                <a:srgbClr val="002060"/>
+              </a:solidFill>
+            </a:endParaRPr>
+          </a:p>
+          <a:p>
+            <a:pPr>
+              <a:buFont typeface="Arial" panose="020B0604020202020204" pitchFamily="34" charset="0"/>
+              <a:buChar char="•"/>
+            </a:pPr>
+            <a:r>
+              <a:rPr lang="en-US" sz="3200" dirty="0">
+                <a:solidFill>
+                  <a:srgbClr val="002060"/>
+                </a:solidFill>
+              </a:rPr>
+              <a:t>Breach in testing environment, not production</a:t>
+            </a:r>
+          </a:p>
+          <a:p>
+            <a:pPr>
+              <a:buFont typeface="Arial" panose="020B0604020202020204" pitchFamily="34" charset="0"/>
+              <a:buChar char="•"/>
+            </a:pPr>
+            <a:r>
+              <a:rPr lang="en-US" sz="3200" dirty="0">
+                <a:solidFill>
+                  <a:srgbClr val="002060"/>
+                </a:solidFill>
+              </a:rPr>
+              <a:t>Limited non-financial data leaked</a:t>
+            </a:r>
+          </a:p>
+          <a:p>
+            <a:pPr>
+              <a:buFont typeface="Arial" panose="020B0604020202020204" pitchFamily="34" charset="0"/>
+              <a:buChar char="•"/>
+            </a:pPr>
+            <a:r>
+              <a:rPr lang="en-US" sz="3200" dirty="0">
+                <a:solidFill>
+                  <a:srgbClr val="002060"/>
+                </a:solidFill>
+              </a:rPr>
+              <a:t>Exposed weakness: unprotected non-prod systems</a:t>
+            </a:r>
+          </a:p>
+          <a:p>
             <a:endParaRPr lang="en-US" dirty="0"/>
           </a:p>
         </p:txBody>
@@ -3642,7 +3733,7 @@
     </p:spTree>
     <p:extLst>
       <p:ext uri="{BB962C8B-B14F-4D97-AF65-F5344CB8AC3E}">
-        <p14:creationId xmlns:p14="http://schemas.microsoft.com/office/powerpoint/2010/main" val="3293701352"/>
+        <p14:creationId xmlns:p14="http://schemas.microsoft.com/office/powerpoint/2010/main" val="3939345999"/>
       </p:ext>
     </p:extLst>
   </p:cSld>
@@ -3674,7 +3765,7 @@
           <p:cNvPr id="2" name="Title 1">
             <a:extLst>
               <a:ext uri="{FF2B5EF4-FFF2-40B4-BE49-F238E27FC236}">
-                <a16:creationId xmlns:a16="http://schemas.microsoft.com/office/drawing/2014/main" id="{2C2BB8FD-7BC1-9721-FC67-04AD2CF45C01}"/>
+                <a16:creationId xmlns:a16="http://schemas.microsoft.com/office/drawing/2014/main" id="{15B77DA1-49B3-9797-00CC-1FD3C45C779A}"/>
               </a:ext>
             </a:extLst>
           </p:cNvPr>
@@ -3692,15 +3783,7 @@
           <a:p>
             <a:r>
               <a:rPr lang="en-US" dirty="0"/>
-              <a:t>Case Study: </a:t>
-            </a:r>
-            <a:r>
-              <a:rPr lang="en-US" dirty="0" err="1"/>
-              <a:t>Fawry</a:t>
-            </a:r>
-            <a:r>
-              <a:rPr lang="en-US" dirty="0"/>
-              <a:t> Data Breach (Egypt, 2023)</a:t>
+              <a:t>Simulated APT Attack: FinTech Egypt Scenario</a:t>
             </a:r>
           </a:p>
         </p:txBody>
@@ -3710,7 +3793,7 @@
           <p:cNvPr id="3" name="Content Placeholder 2">
             <a:extLst>
               <a:ext uri="{FF2B5EF4-FFF2-40B4-BE49-F238E27FC236}">
-                <a16:creationId xmlns:a16="http://schemas.microsoft.com/office/drawing/2014/main" id="{C3EE05A9-9C09-471D-F713-CAFC78FF957A}"/>
+                <a16:creationId xmlns:a16="http://schemas.microsoft.com/office/drawing/2014/main" id="{AAD5BEBA-FEC3-F1FF-E79C-52F2FA096266}"/>
               </a:ext>
             </a:extLst>
           </p:cNvPr>
@@ -3726,32 +3809,13 @@
           <a:bodyPr/>
           <a:lstStyle/>
           <a:p>
-            <a:pPr>
-              <a:buNone/>
-            </a:pPr>
             <a:r>
               <a:rPr lang="en-US" sz="3200" b="1" dirty="0">
                 <a:solidFill>
                   <a:srgbClr val="002060"/>
                 </a:solidFill>
               </a:rPr>
-              <a:t>Case Study: </a:t>
-            </a:r>
-            <a:r>
-              <a:rPr lang="en-US" sz="3200" b="1" dirty="0" err="1">
-                <a:solidFill>
-                  <a:srgbClr val="002060"/>
-                </a:solidFill>
-              </a:rPr>
-              <a:t>Fawry</a:t>
-            </a:r>
-            <a:r>
-              <a:rPr lang="en-US" sz="3200" b="1" dirty="0">
-                <a:solidFill>
-                  <a:srgbClr val="002060"/>
-                </a:solidFill>
-              </a:rPr>
-              <a:t> Data Breach – Egypt (2023)</a:t>
+              <a:t>Simulated APT Attack on a FinTech Company (Egypt)</a:t>
             </a:r>
             <a:endParaRPr lang="en-US" sz="3200" dirty="0">
               <a:solidFill>
@@ -3760,17 +3824,13 @@
             </a:endParaRPr>
           </a:p>
           <a:p>
-            <a:pPr>
-              <a:buFont typeface="Arial" panose="020B0604020202020204" pitchFamily="34" charset="0"/>
-              <a:buChar char="•"/>
-            </a:pPr>
-            <a:r>
-              <a:rPr lang="en-US" sz="3200" dirty="0" err="1">
-                <a:solidFill>
-                  <a:srgbClr val="002060"/>
-                </a:solidFill>
-              </a:rPr>
-              <a:t>LockBit</a:t>
+            <a:r>
+              <a:rPr lang="en-US" sz="3200" b="1" dirty="0">
+                <a:solidFill>
+                  <a:srgbClr val="002060"/>
+                </a:solidFill>
+              </a:rPr>
+              <a:t>Stage 1:</a:t>
             </a:r>
             <a:r>
               <a:rPr lang="en-US" sz="3200" dirty="0">
@@ -3778,62 +3838,79 @@
                   <a:srgbClr val="002060"/>
                 </a:solidFill>
               </a:rPr>
-              <a:t> ransomware claimed attack on </a:t>
-            </a:r>
-            <a:r>
-              <a:rPr lang="en-US" sz="3200" dirty="0" err="1">
-                <a:solidFill>
-                  <a:srgbClr val="002060"/>
-                </a:solidFill>
-              </a:rPr>
-              <a:t>Fawry</a:t>
-            </a:r>
-            <a:endParaRPr lang="en-US" sz="3200" dirty="0">
-              <a:solidFill>
-                <a:srgbClr val="002060"/>
-              </a:solidFill>
-            </a:endParaRPr>
-          </a:p>
-          <a:p>
-            <a:pPr>
-              <a:buFont typeface="Arial" panose="020B0604020202020204" pitchFamily="34" charset="0"/>
-              <a:buChar char="•"/>
-            </a:pPr>
+              <a:t> Recon &amp; Spear-phishing developer</a:t>
+            </a:r>
+          </a:p>
+          <a:p>
+            <a:r>
+              <a:rPr lang="en-US" sz="3200" b="1" dirty="0">
+                <a:solidFill>
+                  <a:srgbClr val="002060"/>
+                </a:solidFill>
+              </a:rPr>
+              <a:t>Stage 2:</a:t>
+            </a:r>
             <a:r>
               <a:rPr lang="en-US" sz="3200" dirty="0">
                 <a:solidFill>
                   <a:srgbClr val="002060"/>
                 </a:solidFill>
               </a:rPr>
-              <a:t>Breach in testing environment, not production</a:t>
-            </a:r>
-          </a:p>
-          <a:p>
-            <a:pPr>
-              <a:buFont typeface="Arial" panose="020B0604020202020204" pitchFamily="34" charset="0"/>
-              <a:buChar char="•"/>
-            </a:pPr>
+              <a:t> Initial access via malicious file or leaked API key</a:t>
+            </a:r>
+          </a:p>
+          <a:p>
+            <a:r>
+              <a:rPr lang="en-US" sz="3200" b="1" dirty="0">
+                <a:solidFill>
+                  <a:srgbClr val="002060"/>
+                </a:solidFill>
+              </a:rPr>
+              <a:t>Stage 3:</a:t>
+            </a:r>
             <a:r>
               <a:rPr lang="en-US" sz="3200" dirty="0">
                 <a:solidFill>
                   <a:srgbClr val="002060"/>
                 </a:solidFill>
               </a:rPr>
-              <a:t>Limited non-financial data leaked</a:t>
-            </a:r>
-          </a:p>
-          <a:p>
-            <a:pPr>
-              <a:buFont typeface="Arial" panose="020B0604020202020204" pitchFamily="34" charset="0"/>
-              <a:buChar char="•"/>
-            </a:pPr>
+              <a:t> Lateral movement &amp; credential dumping</a:t>
+            </a:r>
+          </a:p>
+          <a:p>
+            <a:r>
+              <a:rPr lang="en-US" sz="3200" b="1" dirty="0">
+                <a:solidFill>
+                  <a:srgbClr val="002060"/>
+                </a:solidFill>
+              </a:rPr>
+              <a:t>Stage 4:</a:t>
+            </a:r>
             <a:r>
               <a:rPr lang="en-US" sz="3200" dirty="0">
                 <a:solidFill>
                   <a:srgbClr val="002060"/>
                 </a:solidFill>
               </a:rPr>
-              <a:t>Exposed weakness: unprotected non-prod systems</a:t>
+              <a:t> Data exfiltration / ransomware deployment</a:t>
+            </a:r>
+          </a:p>
+          <a:p>
+            <a:r>
+              <a:rPr lang="en-US" sz="3200" b="1" dirty="0">
+                <a:solidFill>
+                  <a:srgbClr val="002060"/>
+                </a:solidFill>
+              </a:rPr>
+              <a:t>Stage 5:</a:t>
+            </a:r>
+            <a:r>
+              <a:rPr lang="en-US" sz="3200" dirty="0">
+                <a:solidFill>
+                  <a:srgbClr val="002060"/>
+                </a:solidFill>
+              </a:rPr>
+              <a:t> SOC detects, correlates via CTI, responds via SOAR</a:t>
             </a:r>
           </a:p>
           <a:p>
@@ -3844,7 +3921,7 @@
     </p:spTree>
     <p:extLst>
       <p:ext uri="{BB962C8B-B14F-4D97-AF65-F5344CB8AC3E}">
-        <p14:creationId xmlns:p14="http://schemas.microsoft.com/office/powerpoint/2010/main" val="3939345999"/>
+        <p14:creationId xmlns:p14="http://schemas.microsoft.com/office/powerpoint/2010/main" val="3628021062"/>
       </p:ext>
     </p:extLst>
   </p:cSld>
@@ -3876,7 +3953,7 @@
           <p:cNvPr id="2" name="Title 1">
             <a:extLst>
               <a:ext uri="{FF2B5EF4-FFF2-40B4-BE49-F238E27FC236}">
-                <a16:creationId xmlns:a16="http://schemas.microsoft.com/office/drawing/2014/main" id="{15B77DA1-49B3-9797-00CC-1FD3C45C779A}"/>
+                <a16:creationId xmlns:a16="http://schemas.microsoft.com/office/drawing/2014/main" id="{3B390D78-51FC-C963-6D7C-AF73EE34DC84}"/>
               </a:ext>
             </a:extLst>
           </p:cNvPr>
@@ -3893,8 +3970,12 @@
           <a:lstStyle/>
           <a:p>
             <a:r>
-              <a:rPr lang="en-US" dirty="0"/>
-              <a:t>Simulated APT Attack: FinTech Egypt Scenario</a:t>
+              <a:rPr lang="en-US" b="1" dirty="0">
+                <a:solidFill>
+                  <a:srgbClr val="FF0000"/>
+                </a:solidFill>
+              </a:rPr>
+              <a:t>The Misconception: CTI = Just Feeds</a:t>
             </a:r>
           </a:p>
         </p:txBody>
@@ -3904,7 +3985,7 @@
           <p:cNvPr id="3" name="Content Placeholder 2">
             <a:extLst>
               <a:ext uri="{FF2B5EF4-FFF2-40B4-BE49-F238E27FC236}">
-                <a16:creationId xmlns:a16="http://schemas.microsoft.com/office/drawing/2014/main" id="{AAD5BEBA-FEC3-F1FF-E79C-52F2FA096266}"/>
+                <a16:creationId xmlns:a16="http://schemas.microsoft.com/office/drawing/2014/main" id="{DCBE24EA-7855-E31F-0AE7-C06B44C19AC9}"/>
               </a:ext>
             </a:extLst>
           </p:cNvPr>
@@ -3926,7 +4007,7 @@
                   <a:srgbClr val="002060"/>
                 </a:solidFill>
               </a:rPr>
-              <a:t>Simulated APT Attack on a FinTech Company (Egypt)</a:t>
+              <a:t>Common CTI Misconception:</a:t>
             </a:r>
             <a:endParaRPr lang="en-US" sz="3200" dirty="0">
               <a:solidFill>
@@ -3936,92 +4017,42 @@
           </a:p>
           <a:p>
             <a:r>
-              <a:rPr lang="en-US" sz="3200" b="1" dirty="0">
-                <a:solidFill>
-                  <a:srgbClr val="002060"/>
-                </a:solidFill>
-              </a:rPr>
-              <a:t>Stage 1:</a:t>
-            </a:r>
-            <a:r>
               <a:rPr lang="en-US" sz="3200" dirty="0">
                 <a:solidFill>
                   <a:srgbClr val="002060"/>
                 </a:solidFill>
               </a:rPr>
-              <a:t> Recon &amp; Spear-phishing developer</a:t>
-            </a:r>
-          </a:p>
-          <a:p>
-            <a:r>
-              <a:rPr lang="en-US" sz="3200" b="1" dirty="0">
-                <a:solidFill>
-                  <a:srgbClr val="002060"/>
-                </a:solidFill>
-              </a:rPr>
-              <a:t>Stage 2:</a:t>
-            </a:r>
+              <a:t>Many orgs treat CTI as IOCs feed → SIEM/EDR ingestion</a:t>
+            </a:r>
+          </a:p>
+          <a:p>
             <a:r>
               <a:rPr lang="en-US" sz="3200" dirty="0">
                 <a:solidFill>
                   <a:srgbClr val="002060"/>
                 </a:solidFill>
               </a:rPr>
-              <a:t> Initial access via malicious file or leaked API key</a:t>
-            </a:r>
-          </a:p>
-          <a:p>
-            <a:r>
-              <a:rPr lang="en-US" sz="3200" b="1" dirty="0">
-                <a:solidFill>
-                  <a:srgbClr val="002060"/>
-                </a:solidFill>
-              </a:rPr>
-              <a:t>Stage 3:</a:t>
-            </a:r>
+              <a:t>Result: noise, false positives, low business value</a:t>
+            </a:r>
+          </a:p>
+          <a:p>
             <a:r>
               <a:rPr lang="en-US" sz="3200" dirty="0">
                 <a:solidFill>
                   <a:srgbClr val="002060"/>
                 </a:solidFill>
               </a:rPr>
-              <a:t> Lateral movement &amp; credential dumping</a:t>
-            </a:r>
-          </a:p>
-          <a:p>
-            <a:r>
-              <a:rPr lang="en-US" sz="3200" b="1" dirty="0">
-                <a:solidFill>
-                  <a:srgbClr val="002060"/>
-                </a:solidFill>
-              </a:rPr>
-              <a:t>Stage 4:</a:t>
-            </a:r>
+              <a:t>CTI ≠ blocklist → CTI = context-driven decision system</a:t>
+            </a:r>
+          </a:p>
+          <a:p>
             <a:r>
               <a:rPr lang="en-US" sz="3200" dirty="0">
                 <a:solidFill>
                   <a:srgbClr val="002060"/>
                 </a:solidFill>
               </a:rPr>
-              <a:t> Data exfiltration / ransomware deployment</a:t>
-            </a:r>
-          </a:p>
-          <a:p>
-            <a:r>
-              <a:rPr lang="en-US" sz="3200" b="1" dirty="0">
-                <a:solidFill>
-                  <a:srgbClr val="002060"/>
-                </a:solidFill>
-              </a:rPr>
-              <a:t>Stage 5:</a:t>
-            </a:r>
-            <a:r>
-              <a:rPr lang="en-US" sz="3200" dirty="0">
-                <a:solidFill>
-                  <a:srgbClr val="002060"/>
-                </a:solidFill>
-              </a:rPr>
-              <a:t> SOC detects, correlates via CTI, responds via SOAR</a:t>
+              <a:t>Tailor intelligence per stakeholder needs</a:t>
             </a:r>
           </a:p>
           <a:p>
@@ -4032,7 +4063,7 @@
     </p:spTree>
     <p:extLst>
       <p:ext uri="{BB962C8B-B14F-4D97-AF65-F5344CB8AC3E}">
-        <p14:creationId xmlns:p14="http://schemas.microsoft.com/office/powerpoint/2010/main" val="3628021062"/>
+        <p14:creationId xmlns:p14="http://schemas.microsoft.com/office/powerpoint/2010/main" val="4058735040"/>
       </p:ext>
     </p:extLst>
   </p:cSld>
@@ -4064,7 +4095,7 @@
           <p:cNvPr id="2" name="Title 1">
             <a:extLst>
               <a:ext uri="{FF2B5EF4-FFF2-40B4-BE49-F238E27FC236}">
-                <a16:creationId xmlns:a16="http://schemas.microsoft.com/office/drawing/2014/main" id="{3B390D78-51FC-C963-6D7C-AF73EE34DC84}"/>
+                <a16:creationId xmlns:a16="http://schemas.microsoft.com/office/drawing/2014/main" id="{DAFBEDC6-0CAB-4AB9-ABF2-316FACFFC129}"/>
               </a:ext>
             </a:extLst>
           </p:cNvPr>
@@ -4081,46 +4112,92 @@
           <a:lstStyle/>
           <a:p>
             <a:r>
+              <a:rPr lang="en-US" dirty="0"/>
+              <a:t>Tailored CTI Per Team</a:t>
+            </a:r>
+          </a:p>
+        </p:txBody>
+      </p:sp>
+      <p:sp>
+        <p:nvSpPr>
+          <p:cNvPr id="3" name="Content Placeholder 2">
+            <a:extLst>
+              <a:ext uri="{FF2B5EF4-FFF2-40B4-BE49-F238E27FC236}">
+                <a16:creationId xmlns:a16="http://schemas.microsoft.com/office/drawing/2014/main" id="{6BB3DD16-568D-CB64-518C-9D7E0B1BA7B1}"/>
+              </a:ext>
+            </a:extLst>
+          </p:cNvPr>
+          <p:cNvSpPr>
+            <a:spLocks noGrp="1"/>
+          </p:cNvSpPr>
+          <p:nvPr>
+            <p:ph idx="1"/>
+          </p:nvPr>
+        </p:nvSpPr>
+        <p:spPr/>
+        <p:txBody>
+          <a:bodyPr>
+            <a:normAutofit/>
+          </a:bodyPr>
+          <a:lstStyle/>
+          <a:p>
+            <a:r>
               <a:rPr lang="en-US" b="1" dirty="0">
                 <a:solidFill>
-                  <a:srgbClr val="FF0000"/>
-                </a:solidFill>
-              </a:rPr>
-              <a:t>The Misconception: CTI = Just Feeds</a:t>
-            </a:r>
-          </a:p>
-        </p:txBody>
-      </p:sp>
-      <p:sp>
-        <p:nvSpPr>
-          <p:cNvPr id="3" name="Content Placeholder 2">
-            <a:extLst>
-              <a:ext uri="{FF2B5EF4-FFF2-40B4-BE49-F238E27FC236}">
-                <a16:creationId xmlns:a16="http://schemas.microsoft.com/office/drawing/2014/main" id="{DCBE24EA-7855-E31F-0AE7-C06B44C19AC9}"/>
-              </a:ext>
-            </a:extLst>
-          </p:cNvPr>
-          <p:cNvSpPr>
-            <a:spLocks noGrp="1"/>
-          </p:cNvSpPr>
-          <p:nvPr>
-            <p:ph idx="1"/>
-          </p:nvPr>
-        </p:nvSpPr>
-        <p:spPr/>
-        <p:txBody>
-          <a:bodyPr/>
-          <a:lstStyle/>
-          <a:p>
-            <a:r>
-              <a:rPr lang="en-US" sz="3200" b="1" dirty="0">
-                <a:solidFill>
-                  <a:srgbClr val="002060"/>
-                </a:solidFill>
-              </a:rPr>
-              <a:t>Common CTI Misconception:</a:t>
-            </a:r>
-            <a:endParaRPr lang="en-US" sz="3200" dirty="0">
+                  <a:srgbClr val="002060"/>
+                </a:solidFill>
+              </a:rPr>
+              <a:t>SOC / IR:</a:t>
+            </a:r>
+            <a:r>
+              <a:rPr lang="en-US" dirty="0">
+                <a:solidFill>
+                  <a:srgbClr val="002060"/>
+                </a:solidFill>
+              </a:rPr>
+              <a:t> Weekly situational awareness</a:t>
+            </a:r>
+          </a:p>
+          <a:p>
+            <a:r>
+              <a:rPr lang="en-US" dirty="0">
+                <a:solidFill>
+                  <a:srgbClr val="002060"/>
+                </a:solidFill>
+              </a:rPr>
+              <a:t>Active campaigns</a:t>
+            </a:r>
+          </a:p>
+          <a:p>
+            <a:r>
+              <a:rPr lang="en-US" dirty="0">
+                <a:solidFill>
+                  <a:srgbClr val="002060"/>
+                </a:solidFill>
+              </a:rPr>
+              <a:t>New malware trends</a:t>
+            </a:r>
+          </a:p>
+          <a:p>
+            <a:r>
+              <a:rPr lang="en-US" dirty="0">
+                <a:solidFill>
+                  <a:srgbClr val="002060"/>
+                </a:solidFill>
+              </a:rPr>
+              <a:t>Actionable warnings</a:t>
+            </a:r>
+          </a:p>
+          <a:p>
+            <a:r>
+              <a:rPr lang="en-US" b="1" dirty="0">
+                <a:solidFill>
+                  <a:srgbClr val="002060"/>
+                </a:solidFill>
+              </a:rPr>
+              <a:t>Detection Engineering:</a:t>
+            </a:r>
+            <a:endParaRPr lang="en-US" dirty="0">
               <a:solidFill>
                 <a:srgbClr val="002060"/>
               </a:solidFill>
@@ -4128,53 +4205,40 @@
           </a:p>
           <a:p>
             <a:r>
-              <a:rPr lang="en-US" sz="3200" dirty="0">
-                <a:solidFill>
-                  <a:srgbClr val="002060"/>
-                </a:solidFill>
-              </a:rPr>
-              <a:t>Many orgs treat CTI as IOCs feed → SIEM/EDR ingestion</a:t>
-            </a:r>
-          </a:p>
-          <a:p>
-            <a:r>
-              <a:rPr lang="en-US" sz="3200" dirty="0">
-                <a:solidFill>
-                  <a:srgbClr val="002060"/>
-                </a:solidFill>
-              </a:rPr>
-              <a:t>Result: noise, false positives, low business value</a:t>
-            </a:r>
-          </a:p>
-          <a:p>
-            <a:r>
-              <a:rPr lang="en-US" sz="3200" dirty="0">
-                <a:solidFill>
-                  <a:srgbClr val="002060"/>
-                </a:solidFill>
-              </a:rPr>
-              <a:t>CTI ≠ blocklist → CTI = context-driven decision system</a:t>
-            </a:r>
-          </a:p>
-          <a:p>
-            <a:r>
-              <a:rPr lang="en-US" sz="3200" dirty="0">
-                <a:solidFill>
-                  <a:srgbClr val="002060"/>
-                </a:solidFill>
-              </a:rPr>
-              <a:t>Tailor intelligence per stakeholder needs</a:t>
-            </a:r>
-          </a:p>
-          <a:p>
-            <a:endParaRPr lang="en-US" dirty="0"/>
+              <a:rPr lang="en-US" dirty="0">
+                <a:solidFill>
+                  <a:srgbClr val="002060"/>
+                </a:solidFill>
+              </a:rPr>
+              <a:t>TTPs, not IOCs</a:t>
+            </a:r>
+          </a:p>
+          <a:p>
+            <a:r>
+              <a:rPr lang="en-US" dirty="0">
+                <a:solidFill>
+                  <a:srgbClr val="002060"/>
+                </a:solidFill>
+              </a:rPr>
+              <a:t>Threat profile by sector/geography/tech</a:t>
+            </a:r>
+          </a:p>
+          <a:p>
+            <a:r>
+              <a:rPr lang="en-US" dirty="0">
+                <a:solidFill>
+                  <a:srgbClr val="002060"/>
+                </a:solidFill>
+              </a:rPr>
+              <a:t>Gap analysis (rule vs TTP coverage)</a:t>
+            </a:r>
           </a:p>
         </p:txBody>
       </p:sp>
     </p:spTree>
     <p:extLst>
       <p:ext uri="{BB962C8B-B14F-4D97-AF65-F5344CB8AC3E}">
-        <p14:creationId xmlns:p14="http://schemas.microsoft.com/office/powerpoint/2010/main" val="4058735040"/>
+        <p14:creationId xmlns:p14="http://schemas.microsoft.com/office/powerpoint/2010/main" val="3244412247"/>
       </p:ext>
     </p:extLst>
   </p:cSld>
@@ -4206,222 +4270,6 @@
           <p:cNvPr id="2" name="Title 1">
             <a:extLst>
               <a:ext uri="{FF2B5EF4-FFF2-40B4-BE49-F238E27FC236}">
-                <a16:creationId xmlns:a16="http://schemas.microsoft.com/office/drawing/2014/main" id="{DAFBEDC6-0CAB-4AB9-ABF2-316FACFFC129}"/>
-              </a:ext>
-            </a:extLst>
-          </p:cNvPr>
-          <p:cNvSpPr>
-            <a:spLocks noGrp="1"/>
-          </p:cNvSpPr>
-          <p:nvPr>
-            <p:ph type="title"/>
-          </p:nvPr>
-        </p:nvSpPr>
-        <p:spPr/>
-        <p:txBody>
-          <a:bodyPr/>
-          <a:lstStyle/>
-          <a:p>
-            <a:r>
-              <a:rPr lang="en-US" dirty="0"/>
-              <a:t>Tailored CTI Per Team</a:t>
-            </a:r>
-          </a:p>
-        </p:txBody>
-      </p:sp>
-      <p:sp>
-        <p:nvSpPr>
-          <p:cNvPr id="3" name="Content Placeholder 2">
-            <a:extLst>
-              <a:ext uri="{FF2B5EF4-FFF2-40B4-BE49-F238E27FC236}">
-                <a16:creationId xmlns:a16="http://schemas.microsoft.com/office/drawing/2014/main" id="{6BB3DD16-568D-CB64-518C-9D7E0B1BA7B1}"/>
-              </a:ext>
-            </a:extLst>
-          </p:cNvPr>
-          <p:cNvSpPr>
-            <a:spLocks noGrp="1"/>
-          </p:cNvSpPr>
-          <p:nvPr>
-            <p:ph idx="1"/>
-          </p:nvPr>
-        </p:nvSpPr>
-        <p:spPr/>
-        <p:txBody>
-          <a:bodyPr>
-            <a:normAutofit fontScale="85000" lnSpcReduction="20000"/>
-          </a:bodyPr>
-          <a:lstStyle/>
-          <a:p>
-            <a:r>
-              <a:rPr lang="en-US" b="1" dirty="0">
-                <a:solidFill>
-                  <a:srgbClr val="002060"/>
-                </a:solidFill>
-              </a:rPr>
-              <a:t>SOC / IR:</a:t>
-            </a:r>
-            <a:r>
-              <a:rPr lang="en-US" dirty="0">
-                <a:solidFill>
-                  <a:srgbClr val="002060"/>
-                </a:solidFill>
-              </a:rPr>
-              <a:t> Weekly situational awareness</a:t>
-            </a:r>
-          </a:p>
-          <a:p>
-            <a:r>
-              <a:rPr lang="en-US" dirty="0">
-                <a:solidFill>
-                  <a:srgbClr val="002060"/>
-                </a:solidFill>
-              </a:rPr>
-              <a:t>Active campaigns</a:t>
-            </a:r>
-          </a:p>
-          <a:p>
-            <a:r>
-              <a:rPr lang="en-US" dirty="0">
-                <a:solidFill>
-                  <a:srgbClr val="002060"/>
-                </a:solidFill>
-              </a:rPr>
-              <a:t>New malware trends</a:t>
-            </a:r>
-          </a:p>
-          <a:p>
-            <a:r>
-              <a:rPr lang="en-US" dirty="0">
-                <a:solidFill>
-                  <a:srgbClr val="002060"/>
-                </a:solidFill>
-              </a:rPr>
-              <a:t>Actionable warnings</a:t>
-            </a:r>
-          </a:p>
-          <a:p>
-            <a:r>
-              <a:rPr lang="en-US" b="1" dirty="0">
-                <a:solidFill>
-                  <a:srgbClr val="002060"/>
-                </a:solidFill>
-              </a:rPr>
-              <a:t>Detection Engineering:</a:t>
-            </a:r>
-            <a:endParaRPr lang="en-US" dirty="0">
-              <a:solidFill>
-                <a:srgbClr val="002060"/>
-              </a:solidFill>
-            </a:endParaRPr>
-          </a:p>
-          <a:p>
-            <a:r>
-              <a:rPr lang="en-US" dirty="0">
-                <a:solidFill>
-                  <a:srgbClr val="002060"/>
-                </a:solidFill>
-              </a:rPr>
-              <a:t>TTPs, not IOCs</a:t>
-            </a:r>
-          </a:p>
-          <a:p>
-            <a:r>
-              <a:rPr lang="en-US" dirty="0">
-                <a:solidFill>
-                  <a:srgbClr val="002060"/>
-                </a:solidFill>
-              </a:rPr>
-              <a:t>Threat profile by sector/geography/tech</a:t>
-            </a:r>
-          </a:p>
-          <a:p>
-            <a:r>
-              <a:rPr lang="en-US" dirty="0">
-                <a:solidFill>
-                  <a:srgbClr val="002060"/>
-                </a:solidFill>
-              </a:rPr>
-              <a:t>Gap analysis (rule vs TTP coverage)</a:t>
-            </a:r>
-          </a:p>
-          <a:p>
-            <a:r>
-              <a:rPr lang="en-US" b="1" dirty="0">
-                <a:solidFill>
-                  <a:srgbClr val="002060"/>
-                </a:solidFill>
-              </a:rPr>
-              <a:t>No TI Analyst?</a:t>
-            </a:r>
-            <a:r>
-              <a:rPr lang="en-US" dirty="0">
-                <a:solidFill>
-                  <a:srgbClr val="002060"/>
-                </a:solidFill>
-              </a:rPr>
-              <a:t> → TI Duty Rotation</a:t>
-            </a:r>
-          </a:p>
-          <a:p>
-            <a:r>
-              <a:rPr lang="en-US" dirty="0">
-                <a:solidFill>
-                  <a:srgbClr val="002060"/>
-                </a:solidFill>
-              </a:rPr>
-              <a:t>Weekly TI Officer collects, analyzes, reports</a:t>
-            </a:r>
-          </a:p>
-          <a:p>
-            <a:r>
-              <a:rPr lang="en-US" dirty="0">
-                <a:solidFill>
-                  <a:srgbClr val="002060"/>
-                </a:solidFill>
-              </a:rPr>
-              <a:t>Creates small SA brief + action list</a:t>
-            </a:r>
-          </a:p>
-          <a:p>
-            <a:endParaRPr lang="en-US" dirty="0"/>
-          </a:p>
-        </p:txBody>
-      </p:sp>
-    </p:spTree>
-    <p:extLst>
-      <p:ext uri="{BB962C8B-B14F-4D97-AF65-F5344CB8AC3E}">
-        <p14:creationId xmlns:p14="http://schemas.microsoft.com/office/powerpoint/2010/main" val="3244412247"/>
-      </p:ext>
-    </p:extLst>
-  </p:cSld>
-  <p:clrMapOvr>
-    <a:masterClrMapping/>
-  </p:clrMapOvr>
-</p:sld>
-</file>
-
-<file path=ppt/slides/slide16.xml><?xml version="1.0" encoding="utf-8"?>
-<p:sld xmlns:a="http://schemas.openxmlformats.org/drawingml/2006/main" xmlns:r="http://schemas.openxmlformats.org/officeDocument/2006/relationships" xmlns:p="http://schemas.openxmlformats.org/presentationml/2006/main">
-  <p:cSld>
-    <p:spTree>
-      <p:nvGrpSpPr>
-        <p:cNvPr id="1" name=""/>
-        <p:cNvGrpSpPr/>
-        <p:nvPr/>
-      </p:nvGrpSpPr>
-      <p:grpSpPr>
-        <a:xfrm>
-          <a:off x="0" y="0"/>
-          <a:ext cx="0" cy="0"/>
-          <a:chOff x="0" y="0"/>
-          <a:chExt cx="0" cy="0"/>
-        </a:xfrm>
-      </p:grpSpPr>
-      <p:sp>
-        <p:nvSpPr>
-          <p:cNvPr id="2" name="Title 1">
-            <a:extLst>
-              <a:ext uri="{FF2B5EF4-FFF2-40B4-BE49-F238E27FC236}">
                 <a16:creationId xmlns:a16="http://schemas.microsoft.com/office/drawing/2014/main" id="{B55DC1F5-93D5-C268-7DC9-C5AC28B531F5}"/>
               </a:ext>
             </a:extLst>
@@ -4557,7 +4405,7 @@
 </p:sld>
 </file>
 
-<file path=ppt/slides/slide17.xml><?xml version="1.0" encoding="utf-8"?>
+<file path=ppt/slides/slide16.xml><?xml version="1.0" encoding="utf-8"?>
 <p:sld xmlns:a="http://schemas.openxmlformats.org/drawingml/2006/main" xmlns:r="http://schemas.openxmlformats.org/officeDocument/2006/relationships" xmlns:p="http://schemas.openxmlformats.org/presentationml/2006/main">
   <p:cSld>
     <p:spTree>
